--- a/dist/초4/영어/이해와상호작용/초4_영어_이해와상호작용_02_물건위치묻고답하기.pptx
+++ b/dist/초4/영어/이해와상호작용/초4_영어_이해와상호작용_02_물건위치묻고답하기.pptx
@@ -120,20 +120,20 @@
   <p:extLst>
     <p:ext uri="{521415D9-36F7-43E2-AB2F-B90AF26B5E84}">
       <p14:sectionLst xmlns:p14="http://schemas.microsoft.com/office/powerpoint/2010/main">
-        <p14:section name="도입" id="{8f69691d-03f6-3307-2bea-be4650c6101c}">
+        <p14:section name="도입" id="{eacf6b12-d29b-e9bb-7133-4f601b914df4}">
           <p14:sldIdLst>
             <p14:sldId id="256"/>
             <p14:sldId id="257"/>
           </p14:sldIdLst>
         </p14:section>
-        <p14:section name="개념" id="{aafcca0b-1830-e6e2-ac07-a1b4a09e16d8}">
+        <p14:section name="개념" id="{041953b6-9467-4052-3192-022e354055ab}">
           <p14:sldIdLst>
             <p14:sldId id="258"/>
             <p14:sldId id="259"/>
             <p14:sldId id="260"/>
           </p14:sldIdLst>
         </p14:section>
-        <p14:section name="연습" id="{fce934b0-9618-0d95-6874-2a54f2eebb15}">
+        <p14:section name="연습" id="{2f0b62cf-fa07-d13b-ff5f-ac4f637b1159}">
           <p14:sldIdLst>
             <p14:sldId id="261"/>
             <p14:sldId id="262"/>
@@ -141,19 +141,19 @@
             <p14:sldId id="264"/>
           </p14:sldIdLst>
         </p14:section>
-        <p14:section name="확인" id="{da8f6396-aef3-16f2-e5c4-740eccb42cb4}">
+        <p14:section name="확인" id="{22630b97-0925-5a1d-dca4-a9e652f39543}">
           <p14:sldIdLst>
             <p14:sldId id="265"/>
             <p14:sldId id="266"/>
             <p14:sldId id="267"/>
           </p14:sldIdLst>
         </p14:section>
-        <p14:section name="정리" id="{521ad4ed-b61a-4924-056c-26823b19a767}">
+        <p14:section name="정리" id="{a822dae9-e8f2-ba49-c711-20b2d50677ba}">
           <p14:sldIdLst>
             <p14:sldId id="268"/>
           </p14:sldIdLst>
         </p14:section>
-        <p14:section name="보충" id="{41043dd2-0269-1667-bb1f-debbed5f0ff9}">
+        <p14:section name="보충" id="{8637eecd-fdd2-36b5-182d-7375f8948446}">
           <p14:sldIdLst>
             <p14:sldId id="269"/>
           </p14:sldIdLst>
